--- a/Figures/microfluidic.pptx
+++ b/Figures/microfluidic.pptx
@@ -6802,7 +6802,7 @@
         </p:nvGrpSpPr>
         <p:grpSpPr>
           <a:xfrm>
-            <a:off x="3051174" y="2160326"/>
+            <a:off x="3167409" y="2160326"/>
             <a:ext cx="430400" cy="421247"/>
             <a:chOff x="3276427" y="2358276"/>
             <a:chExt cx="430400" cy="421247"/>
@@ -6931,7 +6931,7 @@
                 <a:blipFill>
                   <a:blip r:embed="rId2"/>
                   <a:stretch>
-                    <a:fillRect r="-24444"/>
+                    <a:fillRect r="-25000"/>
                   </a:stretch>
                 </a:blipFill>
               </p:spPr>
@@ -6969,7 +6969,7 @@
         </p:nvCxnSpPr>
         <p:spPr>
           <a:xfrm rot="5400000" flipH="1" flipV="1">
-            <a:off x="439681" y="1262393"/>
+            <a:off x="555916" y="1262393"/>
             <a:ext cx="566091" cy="1343242"/>
           </a:xfrm>
           <a:prstGeom prst="bentConnector2">
@@ -7012,7 +7012,7 @@
         </p:nvCxnSpPr>
         <p:spPr>
           <a:xfrm flipH="1">
-            <a:off x="3481576" y="2370949"/>
+            <a:off x="3597811" y="2370949"/>
             <a:ext cx="1844325" cy="1"/>
           </a:xfrm>
           <a:prstGeom prst="straightConnector1">
@@ -7052,7 +7052,7 @@
         </p:nvSpPr>
         <p:spPr>
           <a:xfrm rot="16200000">
-            <a:off x="5168694" y="1888055"/>
+            <a:off x="5284929" y="1888055"/>
             <a:ext cx="1280197" cy="965784"/>
           </a:xfrm>
           <a:prstGeom prst="roundRect">
@@ -7102,7 +7102,7 @@
         </p:nvCxnSpPr>
         <p:spPr>
           <a:xfrm rot="5400000" flipH="1">
-            <a:off x="5764028" y="1982139"/>
+            <a:off x="5880263" y="1982139"/>
             <a:ext cx="0" cy="765155"/>
           </a:xfrm>
           <a:prstGeom prst="straightConnector1">
@@ -7144,7 +7144,7 @@
         </p:nvCxnSpPr>
         <p:spPr>
           <a:xfrm rot="16200000" flipH="1">
-            <a:off x="5296080" y="2307227"/>
+            <a:off x="5412315" y="2307227"/>
             <a:ext cx="1020917" cy="0"/>
           </a:xfrm>
           <a:prstGeom prst="straightConnector1">
@@ -7184,7 +7184,7 @@
         </p:nvSpPr>
         <p:spPr>
           <a:xfrm>
-            <a:off x="5410184" y="2122497"/>
+            <a:off x="5526419" y="2122497"/>
             <a:ext cx="805338" cy="511084"/>
           </a:xfrm>
           <a:custGeom>
@@ -7293,7 +7293,7 @@
         </p:nvCxnSpPr>
         <p:spPr>
           <a:xfrm flipH="1" flipV="1">
-            <a:off x="6291685" y="2370947"/>
+            <a:off x="6407920" y="2370947"/>
             <a:ext cx="722335" cy="7096"/>
           </a:xfrm>
           <a:prstGeom prst="straightConnector1">
@@ -7335,7 +7335,7 @@
             </p:nvSpPr>
             <p:spPr>
               <a:xfrm>
-                <a:off x="6408632" y="1890134"/>
+                <a:off x="6524867" y="1890134"/>
                 <a:ext cx="1366150" cy="400110"/>
               </a:xfrm>
               <a:prstGeom prst="rect">
@@ -7421,7 +7421,7 @@
             </p:nvSpPr>
             <p:spPr>
               <a:xfrm>
-                <a:off x="6408632" y="1890134"/>
+                <a:off x="6524867" y="1890134"/>
                 <a:ext cx="1366150" cy="400110"/>
               </a:xfrm>
               <a:prstGeom prst="rect">
@@ -7463,7 +7463,7 @@
         </p:nvSpPr>
         <p:spPr>
           <a:xfrm>
-            <a:off x="5167852" y="1038438"/>
+            <a:off x="5284087" y="1038438"/>
             <a:ext cx="1266942" cy="646331"/>
           </a:xfrm>
           <a:prstGeom prst="rect">
@@ -7509,7 +7509,7 @@
             </p:nvSpPr>
             <p:spPr>
               <a:xfrm>
-                <a:off x="3295222" y="1486623"/>
+                <a:off x="3411457" y="1486623"/>
                 <a:ext cx="1660944" cy="672235"/>
               </a:xfrm>
               <a:prstGeom prst="rect">
@@ -7655,7 +7655,7 @@
             </p:nvSpPr>
             <p:spPr>
               <a:xfrm>
-                <a:off x="3295222" y="1486623"/>
+                <a:off x="3411457" y="1486623"/>
                 <a:ext cx="1660944" cy="672235"/>
               </a:xfrm>
               <a:prstGeom prst="rect">
@@ -7699,7 +7699,7 @@
             </p:nvSpPr>
             <p:spPr>
               <a:xfrm>
-                <a:off x="607038" y="1320575"/>
+                <a:off x="723273" y="1320575"/>
                 <a:ext cx="358495" cy="307777"/>
               </a:xfrm>
               <a:prstGeom prst="rect">
@@ -7773,7 +7773,7 @@
             </p:nvSpPr>
             <p:spPr>
               <a:xfrm>
-                <a:off x="607038" y="1320575"/>
+                <a:off x="723273" y="1320575"/>
                 <a:ext cx="358495" cy="307777"/>
               </a:xfrm>
               <a:prstGeom prst="rect">
@@ -7817,7 +7817,7 @@
             </p:nvSpPr>
             <p:spPr>
               <a:xfrm>
-                <a:off x="677047" y="2056610"/>
+                <a:off x="793282" y="2056610"/>
                 <a:ext cx="352532" cy="307777"/>
               </a:xfrm>
               <a:prstGeom prst="rect">
@@ -7891,7 +7891,7 @@
             </p:nvSpPr>
             <p:spPr>
               <a:xfrm>
-                <a:off x="677047" y="2056610"/>
+                <a:off x="793282" y="2056610"/>
                 <a:ext cx="352532" cy="307777"/>
               </a:xfrm>
               <a:prstGeom prst="rect">
@@ -7935,7 +7935,7 @@
             </p:nvSpPr>
             <p:spPr>
               <a:xfrm>
-                <a:off x="648564" y="566368"/>
+                <a:off x="764799" y="566368"/>
                 <a:ext cx="358495" cy="307777"/>
               </a:xfrm>
               <a:prstGeom prst="rect">
@@ -8010,7 +8010,7 @@
             </p:nvSpPr>
             <p:spPr>
               <a:xfrm>
-                <a:off x="648564" y="566368"/>
+                <a:off x="764799" y="566368"/>
                 <a:ext cx="358495" cy="307777"/>
               </a:xfrm>
               <a:prstGeom prst="rect">
@@ -8054,7 +8054,7 @@
             </p:nvSpPr>
             <p:spPr>
               <a:xfrm>
-                <a:off x="-110062" y="2217061"/>
+                <a:off x="6173" y="2217061"/>
                 <a:ext cx="322331" cy="307777"/>
               </a:xfrm>
               <a:prstGeom prst="rect">
@@ -8129,7 +8129,7 @@
             </p:nvSpPr>
             <p:spPr>
               <a:xfrm>
-                <a:off x="-110062" y="2217061"/>
+                <a:off x="6173" y="2217061"/>
                 <a:ext cx="322331" cy="307777"/>
               </a:xfrm>
               <a:prstGeom prst="rect">
@@ -8138,7 +8138,7 @@
               <a:blipFill>
                 <a:blip r:embed="rId8"/>
                 <a:stretch>
-                  <a:fillRect l="-11321" r="-1887" b="-12000"/>
+                  <a:fillRect l="-9434" r="-1887" b="-12000"/>
                 </a:stretch>
               </a:blipFill>
             </p:spPr>
@@ -8171,7 +8171,7 @@
         </p:nvSpPr>
         <p:spPr>
           <a:xfrm>
-            <a:off x="436400" y="502475"/>
+            <a:off x="552635" y="502475"/>
             <a:ext cx="4536067" cy="2358558"/>
           </a:xfrm>
           <a:prstGeom prst="roundRect">
@@ -8226,7 +8226,7 @@
         </p:nvSpPr>
         <p:spPr>
           <a:xfrm rot="5400000">
-            <a:off x="2595880" y="1415825"/>
+            <a:off x="2712115" y="1415825"/>
             <a:ext cx="325904" cy="4177946"/>
           </a:xfrm>
           <a:prstGeom prst="rightBrace">
@@ -8288,7 +8288,7 @@
         </p:blipFill>
         <p:spPr>
           <a:xfrm>
-            <a:off x="5314174" y="3931004"/>
+            <a:off x="5430409" y="3931004"/>
             <a:ext cx="1079168" cy="1079168"/>
           </a:xfrm>
           <a:prstGeom prst="rect">
@@ -8310,7 +8310,7 @@
         </p:nvSpPr>
         <p:spPr>
           <a:xfrm rot="5400000">
-            <a:off x="5699471" y="2747197"/>
+            <a:off x="5815706" y="2747197"/>
             <a:ext cx="269931" cy="1476317"/>
           </a:xfrm>
           <a:prstGeom prst="rightBrace">
@@ -8358,7 +8358,7 @@
         </p:nvSpPr>
         <p:spPr>
           <a:xfrm>
-            <a:off x="6525013" y="4179963"/>
+            <a:off x="6641248" y="4179963"/>
             <a:ext cx="1266942" cy="707886"/>
           </a:xfrm>
           <a:prstGeom prst="rect">
@@ -8402,7 +8402,7 @@
         </p:nvSpPr>
         <p:spPr>
           <a:xfrm>
-            <a:off x="829666" y="2"/>
+            <a:off x="945901" y="2"/>
             <a:ext cx="3549160" cy="461665"/>
           </a:xfrm>
           <a:prstGeom prst="rect">
@@ -8446,7 +8446,7 @@
         </p:blipFill>
         <p:spPr>
           <a:xfrm>
-            <a:off x="810319" y="4049866"/>
+            <a:off x="926554" y="4049866"/>
             <a:ext cx="4073480" cy="1089479"/>
           </a:xfrm>
           <a:prstGeom prst="rect">
@@ -8468,8 +8468,8 @@
         </p:nvSpPr>
         <p:spPr>
           <a:xfrm rot="5400000">
-            <a:off x="4180112" y="1662550"/>
-            <a:ext cx="215415" cy="7163930"/>
+            <a:off x="4098469" y="1846905"/>
+            <a:ext cx="215415" cy="6965808"/>
           </a:xfrm>
           <a:prstGeom prst="rightBrace">
             <a:avLst>
@@ -8516,7 +8516,7 @@
         </p:nvSpPr>
         <p:spPr>
           <a:xfrm>
-            <a:off x="1266966" y="3699650"/>
+            <a:off x="1383201" y="3699650"/>
             <a:ext cx="2979534" cy="369332"/>
           </a:xfrm>
           <a:prstGeom prst="rect">
@@ -8551,7 +8551,7 @@
         </p:nvSpPr>
         <p:spPr>
           <a:xfrm>
-            <a:off x="5879022" y="5833036"/>
+            <a:off x="5831852" y="5833937"/>
             <a:ext cx="2076338" cy="369332"/>
           </a:xfrm>
           <a:prstGeom prst="rect">
@@ -8590,7 +8590,7 @@
         </p:nvCxnSpPr>
         <p:spPr>
           <a:xfrm>
-            <a:off x="212268" y="2370948"/>
+            <a:off x="328503" y="2370948"/>
             <a:ext cx="2838906" cy="0"/>
           </a:xfrm>
           <a:prstGeom prst="straightConnector1">
@@ -8631,7 +8631,7 @@
             </p:nvSpPr>
             <p:spPr>
               <a:xfrm>
-                <a:off x="1394347" y="1438107"/>
+                <a:off x="1510582" y="1438107"/>
                 <a:ext cx="714375" cy="425725"/>
               </a:xfrm>
               <a:prstGeom prst="roundRect">
@@ -8730,7 +8730,7 @@
             </p:nvSpPr>
             <p:spPr>
               <a:xfrm>
-                <a:off x="1394347" y="1438107"/>
+                <a:off x="1510582" y="1438107"/>
                 <a:ext cx="714375" cy="425725"/>
               </a:xfrm>
               <a:prstGeom prst="roundRect">
@@ -8775,7 +8775,7 @@
             </p:nvSpPr>
             <p:spPr>
               <a:xfrm>
-                <a:off x="1378954" y="694973"/>
+                <a:off x="1495189" y="694973"/>
                 <a:ext cx="714375" cy="425725"/>
               </a:xfrm>
               <a:prstGeom prst="roundRect">
@@ -8874,7 +8874,7 @@
             </p:nvSpPr>
             <p:spPr>
               <a:xfrm>
-                <a:off x="1378954" y="694973"/>
+                <a:off x="1495189" y="694973"/>
                 <a:ext cx="714375" cy="425725"/>
               </a:xfrm>
               <a:prstGeom prst="roundRect">
@@ -8920,7 +8920,7 @@
         </p:nvCxnSpPr>
         <p:spPr>
           <a:xfrm>
-            <a:off x="2108720" y="1650968"/>
+            <a:off x="2224955" y="1650968"/>
             <a:ext cx="991052" cy="603616"/>
           </a:xfrm>
           <a:prstGeom prst="bentConnector3">
@@ -8965,7 +8965,7 @@
         </p:nvCxnSpPr>
         <p:spPr>
           <a:xfrm>
-            <a:off x="2093329" y="907836"/>
+            <a:off x="2209564" y="907836"/>
             <a:ext cx="1173047" cy="1252491"/>
           </a:xfrm>
           <a:prstGeom prst="bentConnector2">
@@ -9008,7 +9008,7 @@
         </p:nvCxnSpPr>
         <p:spPr>
           <a:xfrm rot="5400000" flipH="1" flipV="1">
-            <a:off x="60417" y="898525"/>
+            <a:off x="176652" y="898525"/>
             <a:ext cx="1309225" cy="1327849"/>
           </a:xfrm>
           <a:prstGeom prst="bentConnector2">
@@ -9049,7 +9049,7 @@
             </p:nvSpPr>
             <p:spPr>
               <a:xfrm>
-                <a:off x="2317784" y="720555"/>
+                <a:off x="2434019" y="720555"/>
                 <a:ext cx="490647" cy="307777"/>
               </a:xfrm>
               <a:prstGeom prst="rect">
@@ -9131,7 +9131,7 @@
             </p:nvSpPr>
             <p:spPr>
               <a:xfrm>
-                <a:off x="2317784" y="720555"/>
+                <a:off x="2434019" y="720555"/>
                 <a:ext cx="490647" cy="307777"/>
               </a:xfrm>
               <a:prstGeom prst="rect">
@@ -9175,7 +9175,7 @@
             </p:nvSpPr>
             <p:spPr>
               <a:xfrm>
-                <a:off x="2291331" y="1488240"/>
+                <a:off x="2407566" y="1488240"/>
                 <a:ext cx="490647" cy="307777"/>
               </a:xfrm>
               <a:prstGeom prst="rect">
@@ -9257,7 +9257,7 @@
             </p:nvSpPr>
             <p:spPr>
               <a:xfrm>
-                <a:off x="2291331" y="1488240"/>
+                <a:off x="2407566" y="1488240"/>
                 <a:ext cx="490647" cy="307777"/>
               </a:xfrm>
               <a:prstGeom prst="rect">
@@ -9301,7 +9301,7 @@
         </p:nvGrpSpPr>
         <p:grpSpPr>
           <a:xfrm>
-            <a:off x="2536652" y="5445593"/>
+            <a:off x="2439093" y="5473597"/>
             <a:ext cx="3238758" cy="1303047"/>
             <a:chOff x="2364325" y="1841630"/>
             <a:chExt cx="7096125" cy="2854974"/>

--- a/Figures/microfluidic.pptx
+++ b/Figures/microfluidic.pptx
@@ -8425,35 +8425,6 @@
           </a:p>
         </p:txBody>
       </p:sp>
-      <p:pic>
-        <p:nvPicPr>
-          <p:cNvPr id="13" name="Picture 12">
-            <a:extLst>
-              <a:ext uri="{FF2B5EF4-FFF2-40B4-BE49-F238E27FC236}">
-                <a16:creationId xmlns:a16="http://schemas.microsoft.com/office/drawing/2014/main" id="{1CAD1BAD-D579-841B-A1C2-7E7DE72CD9DF}"/>
-              </a:ext>
-            </a:extLst>
-          </p:cNvPr>
-          <p:cNvPicPr>
-            <a:picLocks noChangeAspect="1"/>
-          </p:cNvPicPr>
-          <p:nvPr/>
-        </p:nvPicPr>
-        <p:blipFill>
-          <a:blip r:embed="rId10"/>
-          <a:srcRect t="15690" b="34731"/>
-          <a:stretch/>
-        </p:blipFill>
-        <p:spPr>
-          <a:xfrm>
-            <a:off x="926554" y="4049866"/>
-            <a:ext cx="4073480" cy="1089479"/>
-          </a:xfrm>
-          <a:prstGeom prst="rect">
-            <a:avLst/>
-          </a:prstGeom>
-        </p:spPr>
-      </p:pic>
       <p:sp>
         <p:nvSpPr>
           <p:cNvPr id="38" name="Right Brace 37">
@@ -8737,7 +8708,7 @@
                 <a:avLst/>
               </a:prstGeom>
               <a:blipFill>
-                <a:blip r:embed="rId11"/>
+                <a:blip r:embed="rId10"/>
                 <a:stretch>
                   <a:fillRect/>
                 </a:stretch>
@@ -8881,7 +8852,7 @@
                 <a:avLst/>
               </a:prstGeom>
               <a:blipFill>
-                <a:blip r:embed="rId12"/>
+                <a:blip r:embed="rId11"/>
                 <a:stretch>
                   <a:fillRect/>
                 </a:stretch>
@@ -9138,7 +9109,7 @@
                 <a:avLst/>
               </a:prstGeom>
               <a:blipFill>
-                <a:blip r:embed="rId13"/>
+                <a:blip r:embed="rId12"/>
                 <a:stretch>
                   <a:fillRect l="-6173" r="-2469" b="-13725"/>
                 </a:stretch>
@@ -9264,7 +9235,7 @@
                 <a:avLst/>
               </a:prstGeom>
               <a:blipFill>
-                <a:blip r:embed="rId14"/>
+                <a:blip r:embed="rId13"/>
                 <a:stretch>
                   <a:fillRect l="-7500" r="-3750" b="-13725"/>
                 </a:stretch>
@@ -11049,6 +11020,959 @@
           </p:style>
         </p:cxnSp>
       </p:grpSp>
+      <p:sp>
+        <p:nvSpPr>
+          <p:cNvPr id="120" name="Rechteck 119">
+            <a:extLst>
+              <a:ext uri="{FF2B5EF4-FFF2-40B4-BE49-F238E27FC236}">
+                <a16:creationId xmlns:a16="http://schemas.microsoft.com/office/drawing/2014/main" id="{397232A4-0D31-E300-C2F5-9DD7454E6C23}"/>
+              </a:ext>
+            </a:extLst>
+          </p:cNvPr>
+          <p:cNvSpPr/>
+          <p:nvPr/>
+        </p:nvSpPr>
+        <p:spPr>
+          <a:xfrm>
+            <a:off x="884503" y="4208826"/>
+            <a:ext cx="3994492" cy="834526"/>
+          </a:xfrm>
+          <a:prstGeom prst="rect">
+            <a:avLst/>
+          </a:prstGeom>
+          <a:gradFill flip="none" rotWithShape="1">
+            <a:gsLst>
+              <a:gs pos="0">
+                <a:schemeClr val="accent2">
+                  <a:lumMod val="20000"/>
+                  <a:lumOff val="80000"/>
+                </a:schemeClr>
+              </a:gs>
+              <a:gs pos="51000">
+                <a:schemeClr val="accent2">
+                  <a:lumMod val="60000"/>
+                  <a:lumOff val="40000"/>
+                </a:schemeClr>
+              </a:gs>
+              <a:gs pos="26000">
+                <a:schemeClr val="accent2">
+                  <a:lumMod val="40000"/>
+                  <a:lumOff val="60000"/>
+                </a:schemeClr>
+              </a:gs>
+              <a:gs pos="100000">
+                <a:schemeClr val="accent2">
+                  <a:lumMod val="75000"/>
+                </a:schemeClr>
+              </a:gs>
+            </a:gsLst>
+            <a:lin ang="10800000" scaled="1"/>
+            <a:tileRect/>
+          </a:gradFill>
+          <a:ln>
+            <a:noFill/>
+          </a:ln>
+        </p:spPr>
+        <p:style>
+          <a:lnRef idx="2">
+            <a:schemeClr val="accent1">
+              <a:shade val="15000"/>
+            </a:schemeClr>
+          </a:lnRef>
+          <a:fillRef idx="1">
+            <a:schemeClr val="accent1"/>
+          </a:fillRef>
+          <a:effectRef idx="0">
+            <a:schemeClr val="accent1"/>
+          </a:effectRef>
+          <a:fontRef idx="minor">
+            <a:schemeClr val="lt1"/>
+          </a:fontRef>
+        </p:style>
+        <p:txBody>
+          <a:bodyPr rtlCol="0" anchor="ctr"/>
+          <a:lstStyle/>
+          <a:p>
+            <a:pPr algn="ctr"/>
+            <a:endParaRPr lang="en-DE"/>
+          </a:p>
+        </p:txBody>
+      </p:sp>
+      <p:sp>
+        <p:nvSpPr>
+          <p:cNvPr id="121" name="Bogen 120">
+            <a:extLst>
+              <a:ext uri="{FF2B5EF4-FFF2-40B4-BE49-F238E27FC236}">
+                <a16:creationId xmlns:a16="http://schemas.microsoft.com/office/drawing/2014/main" id="{C5F4A38C-0B7A-1F58-17C2-0AFB84AE1BE5}"/>
+              </a:ext>
+            </a:extLst>
+          </p:cNvPr>
+          <p:cNvSpPr/>
+          <p:nvPr/>
+        </p:nvSpPr>
+        <p:spPr>
+          <a:xfrm>
+            <a:off x="721366" y="4208826"/>
+            <a:ext cx="941545" cy="834526"/>
+          </a:xfrm>
+          <a:prstGeom prst="arc">
+            <a:avLst>
+              <a:gd name="adj1" fmla="val 16458577"/>
+              <a:gd name="adj2" fmla="val 5187811"/>
+            </a:avLst>
+          </a:prstGeom>
+          <a:ln>
+            <a:solidFill>
+              <a:schemeClr val="tx1"/>
+            </a:solidFill>
+            <a:prstDash val="dash"/>
+          </a:ln>
+        </p:spPr>
+        <p:style>
+          <a:lnRef idx="2">
+            <a:schemeClr val="accent1"/>
+          </a:lnRef>
+          <a:fillRef idx="0">
+            <a:schemeClr val="accent1"/>
+          </a:fillRef>
+          <a:effectRef idx="1">
+            <a:schemeClr val="accent1"/>
+          </a:effectRef>
+          <a:fontRef idx="minor">
+            <a:schemeClr val="tx1"/>
+          </a:fontRef>
+        </p:style>
+        <p:txBody>
+          <a:bodyPr rtlCol="0" anchor="ctr"/>
+          <a:lstStyle/>
+          <a:p>
+            <a:pPr algn="ctr"/>
+            <a:endParaRPr lang="en-DE"/>
+          </a:p>
+        </p:txBody>
+      </p:sp>
+      <p:cxnSp>
+        <p:nvCxnSpPr>
+          <p:cNvPr id="123" name="Gerade Verbindung mit Pfeil 122">
+            <a:extLst>
+              <a:ext uri="{FF2B5EF4-FFF2-40B4-BE49-F238E27FC236}">
+                <a16:creationId xmlns:a16="http://schemas.microsoft.com/office/drawing/2014/main" id="{066B2F54-59A1-1DE3-7531-F07CA4BB6BDF}"/>
+              </a:ext>
+            </a:extLst>
+          </p:cNvPr>
+          <p:cNvCxnSpPr/>
+          <p:nvPr/>
+        </p:nvCxnSpPr>
+        <p:spPr>
+          <a:xfrm>
+            <a:off x="1674471" y="4640105"/>
+            <a:ext cx="371501" cy="0"/>
+          </a:xfrm>
+          <a:prstGeom prst="straightConnector1">
+            <a:avLst/>
+          </a:prstGeom>
+          <a:ln>
+            <a:solidFill>
+              <a:schemeClr val="tx1"/>
+            </a:solidFill>
+            <a:tailEnd type="triangle"/>
+          </a:ln>
+        </p:spPr>
+        <p:style>
+          <a:lnRef idx="2">
+            <a:schemeClr val="accent1"/>
+          </a:lnRef>
+          <a:fillRef idx="0">
+            <a:schemeClr val="accent1"/>
+          </a:fillRef>
+          <a:effectRef idx="1">
+            <a:schemeClr val="accent1"/>
+          </a:effectRef>
+          <a:fontRef idx="minor">
+            <a:schemeClr val="tx1"/>
+          </a:fontRef>
+        </p:style>
+      </p:cxnSp>
+      <p:cxnSp>
+        <p:nvCxnSpPr>
+          <p:cNvPr id="124" name="Gerade Verbindung mit Pfeil 123">
+            <a:extLst>
+              <a:ext uri="{FF2B5EF4-FFF2-40B4-BE49-F238E27FC236}">
+                <a16:creationId xmlns:a16="http://schemas.microsoft.com/office/drawing/2014/main" id="{E826BA7A-5A82-69FB-B8E5-B7BF87150126}"/>
+              </a:ext>
+            </a:extLst>
+          </p:cNvPr>
+          <p:cNvCxnSpPr/>
+          <p:nvPr/>
+        </p:nvCxnSpPr>
+        <p:spPr>
+          <a:xfrm>
+            <a:off x="1610463" y="4800254"/>
+            <a:ext cx="252000" cy="0"/>
+          </a:xfrm>
+          <a:prstGeom prst="straightConnector1">
+            <a:avLst/>
+          </a:prstGeom>
+          <a:ln>
+            <a:solidFill>
+              <a:schemeClr val="tx1"/>
+            </a:solidFill>
+            <a:tailEnd type="triangle"/>
+          </a:ln>
+        </p:spPr>
+        <p:style>
+          <a:lnRef idx="2">
+            <a:schemeClr val="accent1"/>
+          </a:lnRef>
+          <a:fillRef idx="0">
+            <a:schemeClr val="accent1"/>
+          </a:fillRef>
+          <a:effectRef idx="1">
+            <a:schemeClr val="accent1"/>
+          </a:effectRef>
+          <a:fontRef idx="minor">
+            <a:schemeClr val="tx1"/>
+          </a:fontRef>
+        </p:style>
+      </p:cxnSp>
+      <p:cxnSp>
+        <p:nvCxnSpPr>
+          <p:cNvPr id="125" name="Gerade Verbindung mit Pfeil 124">
+            <a:extLst>
+              <a:ext uri="{FF2B5EF4-FFF2-40B4-BE49-F238E27FC236}">
+                <a16:creationId xmlns:a16="http://schemas.microsoft.com/office/drawing/2014/main" id="{6EC611C5-93E4-86C5-AE2B-E22E5D8C7AF2}"/>
+              </a:ext>
+            </a:extLst>
+          </p:cNvPr>
+          <p:cNvCxnSpPr/>
+          <p:nvPr/>
+        </p:nvCxnSpPr>
+        <p:spPr>
+          <a:xfrm>
+            <a:off x="1631468" y="4479956"/>
+            <a:ext cx="252000" cy="0"/>
+          </a:xfrm>
+          <a:prstGeom prst="straightConnector1">
+            <a:avLst/>
+          </a:prstGeom>
+          <a:ln>
+            <a:solidFill>
+              <a:schemeClr val="tx1"/>
+            </a:solidFill>
+            <a:tailEnd type="triangle"/>
+          </a:ln>
+        </p:spPr>
+        <p:style>
+          <a:lnRef idx="2">
+            <a:schemeClr val="accent1"/>
+          </a:lnRef>
+          <a:fillRef idx="0">
+            <a:schemeClr val="accent1"/>
+          </a:fillRef>
+          <a:effectRef idx="1">
+            <a:schemeClr val="accent1"/>
+          </a:effectRef>
+          <a:fontRef idx="minor">
+            <a:schemeClr val="tx1"/>
+          </a:fontRef>
+        </p:style>
+      </p:cxnSp>
+      <p:cxnSp>
+        <p:nvCxnSpPr>
+          <p:cNvPr id="126" name="Gerade Verbindung mit Pfeil 125">
+            <a:extLst>
+              <a:ext uri="{FF2B5EF4-FFF2-40B4-BE49-F238E27FC236}">
+                <a16:creationId xmlns:a16="http://schemas.microsoft.com/office/drawing/2014/main" id="{8E9DD028-69FE-4A09-CCE8-DEDD9439BF57}"/>
+              </a:ext>
+            </a:extLst>
+          </p:cNvPr>
+          <p:cNvCxnSpPr/>
+          <p:nvPr/>
+        </p:nvCxnSpPr>
+        <p:spPr>
+          <a:xfrm>
+            <a:off x="1505468" y="4319807"/>
+            <a:ext cx="180000" cy="0"/>
+          </a:xfrm>
+          <a:prstGeom prst="straightConnector1">
+            <a:avLst/>
+          </a:prstGeom>
+          <a:ln>
+            <a:solidFill>
+              <a:schemeClr val="tx1"/>
+            </a:solidFill>
+            <a:tailEnd type="triangle"/>
+          </a:ln>
+        </p:spPr>
+        <p:style>
+          <a:lnRef idx="2">
+            <a:schemeClr val="accent1"/>
+          </a:lnRef>
+          <a:fillRef idx="0">
+            <a:schemeClr val="accent1"/>
+          </a:fillRef>
+          <a:effectRef idx="1">
+            <a:schemeClr val="accent1"/>
+          </a:effectRef>
+          <a:fontRef idx="minor">
+            <a:schemeClr val="tx1"/>
+          </a:fontRef>
+        </p:style>
+      </p:cxnSp>
+      <p:cxnSp>
+        <p:nvCxnSpPr>
+          <p:cNvPr id="127" name="Gerade Verbindung mit Pfeil 126">
+            <a:extLst>
+              <a:ext uri="{FF2B5EF4-FFF2-40B4-BE49-F238E27FC236}">
+                <a16:creationId xmlns:a16="http://schemas.microsoft.com/office/drawing/2014/main" id="{232CD4F8-7331-3CD9-92BF-F075A3EA1822}"/>
+              </a:ext>
+            </a:extLst>
+          </p:cNvPr>
+          <p:cNvCxnSpPr/>
+          <p:nvPr/>
+        </p:nvCxnSpPr>
+        <p:spPr>
+          <a:xfrm>
+            <a:off x="1481718" y="4960404"/>
+            <a:ext cx="180000" cy="0"/>
+          </a:xfrm>
+          <a:prstGeom prst="straightConnector1">
+            <a:avLst/>
+          </a:prstGeom>
+          <a:ln>
+            <a:solidFill>
+              <a:schemeClr val="tx1"/>
+            </a:solidFill>
+            <a:tailEnd type="triangle"/>
+          </a:ln>
+        </p:spPr>
+        <p:style>
+          <a:lnRef idx="2">
+            <a:schemeClr val="accent1"/>
+          </a:lnRef>
+          <a:fillRef idx="0">
+            <a:schemeClr val="accent1"/>
+          </a:fillRef>
+          <a:effectRef idx="1">
+            <a:schemeClr val="accent1"/>
+          </a:effectRef>
+          <a:fontRef idx="minor">
+            <a:schemeClr val="tx1"/>
+          </a:fontRef>
+        </p:style>
+      </p:cxnSp>
+      <p:sp>
+        <p:nvSpPr>
+          <p:cNvPr id="134" name="Bogen 133">
+            <a:extLst>
+              <a:ext uri="{FF2B5EF4-FFF2-40B4-BE49-F238E27FC236}">
+                <a16:creationId xmlns:a16="http://schemas.microsoft.com/office/drawing/2014/main" id="{73097D2D-3010-11C6-F4B1-1CFF94DF62FA}"/>
+              </a:ext>
+            </a:extLst>
+          </p:cNvPr>
+          <p:cNvSpPr/>
+          <p:nvPr/>
+        </p:nvSpPr>
+        <p:spPr>
+          <a:xfrm>
+            <a:off x="2177643" y="4214670"/>
+            <a:ext cx="941545" cy="834526"/>
+          </a:xfrm>
+          <a:prstGeom prst="arc">
+            <a:avLst>
+              <a:gd name="adj1" fmla="val 16458577"/>
+              <a:gd name="adj2" fmla="val 5187811"/>
+            </a:avLst>
+          </a:prstGeom>
+          <a:ln>
+            <a:solidFill>
+              <a:schemeClr val="tx1"/>
+            </a:solidFill>
+            <a:prstDash val="dash"/>
+          </a:ln>
+        </p:spPr>
+        <p:style>
+          <a:lnRef idx="2">
+            <a:schemeClr val="accent1"/>
+          </a:lnRef>
+          <a:fillRef idx="0">
+            <a:schemeClr val="accent1"/>
+          </a:fillRef>
+          <a:effectRef idx="1">
+            <a:schemeClr val="accent1"/>
+          </a:effectRef>
+          <a:fontRef idx="minor">
+            <a:schemeClr val="tx1"/>
+          </a:fontRef>
+        </p:style>
+        <p:txBody>
+          <a:bodyPr rtlCol="0" anchor="ctr"/>
+          <a:lstStyle/>
+          <a:p>
+            <a:pPr algn="ctr"/>
+            <a:endParaRPr lang="en-DE"/>
+          </a:p>
+        </p:txBody>
+      </p:sp>
+      <p:cxnSp>
+        <p:nvCxnSpPr>
+          <p:cNvPr id="135" name="Gerade Verbindung mit Pfeil 134">
+            <a:extLst>
+              <a:ext uri="{FF2B5EF4-FFF2-40B4-BE49-F238E27FC236}">
+                <a16:creationId xmlns:a16="http://schemas.microsoft.com/office/drawing/2014/main" id="{F01E0B13-623F-DE2A-CCE0-98289622C7E2}"/>
+              </a:ext>
+            </a:extLst>
+          </p:cNvPr>
+          <p:cNvCxnSpPr/>
+          <p:nvPr/>
+        </p:nvCxnSpPr>
+        <p:spPr>
+          <a:xfrm>
+            <a:off x="3130748" y="4645949"/>
+            <a:ext cx="371501" cy="0"/>
+          </a:xfrm>
+          <a:prstGeom prst="straightConnector1">
+            <a:avLst/>
+          </a:prstGeom>
+          <a:ln>
+            <a:solidFill>
+              <a:schemeClr val="tx1"/>
+            </a:solidFill>
+            <a:tailEnd type="triangle"/>
+          </a:ln>
+        </p:spPr>
+        <p:style>
+          <a:lnRef idx="2">
+            <a:schemeClr val="accent1"/>
+          </a:lnRef>
+          <a:fillRef idx="0">
+            <a:schemeClr val="accent1"/>
+          </a:fillRef>
+          <a:effectRef idx="1">
+            <a:schemeClr val="accent1"/>
+          </a:effectRef>
+          <a:fontRef idx="minor">
+            <a:schemeClr val="tx1"/>
+          </a:fontRef>
+        </p:style>
+      </p:cxnSp>
+      <p:cxnSp>
+        <p:nvCxnSpPr>
+          <p:cNvPr id="136" name="Gerade Verbindung mit Pfeil 135">
+            <a:extLst>
+              <a:ext uri="{FF2B5EF4-FFF2-40B4-BE49-F238E27FC236}">
+                <a16:creationId xmlns:a16="http://schemas.microsoft.com/office/drawing/2014/main" id="{D7DC7213-8305-7705-1665-A17FCCD595B9}"/>
+              </a:ext>
+            </a:extLst>
+          </p:cNvPr>
+          <p:cNvCxnSpPr/>
+          <p:nvPr/>
+        </p:nvCxnSpPr>
+        <p:spPr>
+          <a:xfrm>
+            <a:off x="3066740" y="4806098"/>
+            <a:ext cx="252000" cy="0"/>
+          </a:xfrm>
+          <a:prstGeom prst="straightConnector1">
+            <a:avLst/>
+          </a:prstGeom>
+          <a:ln>
+            <a:solidFill>
+              <a:schemeClr val="tx1"/>
+            </a:solidFill>
+            <a:tailEnd type="triangle"/>
+          </a:ln>
+        </p:spPr>
+        <p:style>
+          <a:lnRef idx="2">
+            <a:schemeClr val="accent1"/>
+          </a:lnRef>
+          <a:fillRef idx="0">
+            <a:schemeClr val="accent1"/>
+          </a:fillRef>
+          <a:effectRef idx="1">
+            <a:schemeClr val="accent1"/>
+          </a:effectRef>
+          <a:fontRef idx="minor">
+            <a:schemeClr val="tx1"/>
+          </a:fontRef>
+        </p:style>
+      </p:cxnSp>
+      <p:cxnSp>
+        <p:nvCxnSpPr>
+          <p:cNvPr id="137" name="Gerade Verbindung mit Pfeil 136">
+            <a:extLst>
+              <a:ext uri="{FF2B5EF4-FFF2-40B4-BE49-F238E27FC236}">
+                <a16:creationId xmlns:a16="http://schemas.microsoft.com/office/drawing/2014/main" id="{06CD3524-733E-5C7F-AE9C-B7BD5D23CEA2}"/>
+              </a:ext>
+            </a:extLst>
+          </p:cNvPr>
+          <p:cNvCxnSpPr/>
+          <p:nvPr/>
+        </p:nvCxnSpPr>
+        <p:spPr>
+          <a:xfrm>
+            <a:off x="3087745" y="4485800"/>
+            <a:ext cx="252000" cy="0"/>
+          </a:xfrm>
+          <a:prstGeom prst="straightConnector1">
+            <a:avLst/>
+          </a:prstGeom>
+          <a:ln>
+            <a:solidFill>
+              <a:schemeClr val="tx1"/>
+            </a:solidFill>
+            <a:tailEnd type="triangle"/>
+          </a:ln>
+        </p:spPr>
+        <p:style>
+          <a:lnRef idx="2">
+            <a:schemeClr val="accent1"/>
+          </a:lnRef>
+          <a:fillRef idx="0">
+            <a:schemeClr val="accent1"/>
+          </a:fillRef>
+          <a:effectRef idx="1">
+            <a:schemeClr val="accent1"/>
+          </a:effectRef>
+          <a:fontRef idx="minor">
+            <a:schemeClr val="tx1"/>
+          </a:fontRef>
+        </p:style>
+      </p:cxnSp>
+      <p:cxnSp>
+        <p:nvCxnSpPr>
+          <p:cNvPr id="138" name="Gerade Verbindung mit Pfeil 137">
+            <a:extLst>
+              <a:ext uri="{FF2B5EF4-FFF2-40B4-BE49-F238E27FC236}">
+                <a16:creationId xmlns:a16="http://schemas.microsoft.com/office/drawing/2014/main" id="{84DF8B80-2CD6-6CD3-50C1-CDA7E2F0C534}"/>
+              </a:ext>
+            </a:extLst>
+          </p:cNvPr>
+          <p:cNvCxnSpPr/>
+          <p:nvPr/>
+        </p:nvCxnSpPr>
+        <p:spPr>
+          <a:xfrm>
+            <a:off x="2961745" y="4325651"/>
+            <a:ext cx="180000" cy="0"/>
+          </a:xfrm>
+          <a:prstGeom prst="straightConnector1">
+            <a:avLst/>
+          </a:prstGeom>
+          <a:ln>
+            <a:solidFill>
+              <a:schemeClr val="tx1"/>
+            </a:solidFill>
+            <a:tailEnd type="triangle"/>
+          </a:ln>
+        </p:spPr>
+        <p:style>
+          <a:lnRef idx="2">
+            <a:schemeClr val="accent1"/>
+          </a:lnRef>
+          <a:fillRef idx="0">
+            <a:schemeClr val="accent1"/>
+          </a:fillRef>
+          <a:effectRef idx="1">
+            <a:schemeClr val="accent1"/>
+          </a:effectRef>
+          <a:fontRef idx="minor">
+            <a:schemeClr val="tx1"/>
+          </a:fontRef>
+        </p:style>
+      </p:cxnSp>
+      <p:cxnSp>
+        <p:nvCxnSpPr>
+          <p:cNvPr id="139" name="Gerade Verbindung mit Pfeil 138">
+            <a:extLst>
+              <a:ext uri="{FF2B5EF4-FFF2-40B4-BE49-F238E27FC236}">
+                <a16:creationId xmlns:a16="http://schemas.microsoft.com/office/drawing/2014/main" id="{79D35A70-C600-C5F4-6CFE-232394C97A26}"/>
+              </a:ext>
+            </a:extLst>
+          </p:cNvPr>
+          <p:cNvCxnSpPr/>
+          <p:nvPr/>
+        </p:nvCxnSpPr>
+        <p:spPr>
+          <a:xfrm>
+            <a:off x="2937995" y="4966248"/>
+            <a:ext cx="180000" cy="0"/>
+          </a:xfrm>
+          <a:prstGeom prst="straightConnector1">
+            <a:avLst/>
+          </a:prstGeom>
+          <a:ln>
+            <a:solidFill>
+              <a:schemeClr val="tx1"/>
+            </a:solidFill>
+            <a:tailEnd type="triangle"/>
+          </a:ln>
+        </p:spPr>
+        <p:style>
+          <a:lnRef idx="2">
+            <a:schemeClr val="accent1"/>
+          </a:lnRef>
+          <a:fillRef idx="0">
+            <a:schemeClr val="accent1"/>
+          </a:fillRef>
+          <a:effectRef idx="1">
+            <a:schemeClr val="accent1"/>
+          </a:effectRef>
+          <a:fontRef idx="minor">
+            <a:schemeClr val="tx1"/>
+          </a:fontRef>
+        </p:style>
+      </p:cxnSp>
+      <p:sp>
+        <p:nvSpPr>
+          <p:cNvPr id="140" name="Bogen 139">
+            <a:extLst>
+              <a:ext uri="{FF2B5EF4-FFF2-40B4-BE49-F238E27FC236}">
+                <a16:creationId xmlns:a16="http://schemas.microsoft.com/office/drawing/2014/main" id="{F4943016-A88A-62C4-E516-3F89AA8D2B54}"/>
+              </a:ext>
+            </a:extLst>
+          </p:cNvPr>
+          <p:cNvSpPr/>
+          <p:nvPr/>
+        </p:nvSpPr>
+        <p:spPr>
+          <a:xfrm>
+            <a:off x="3520669" y="4211748"/>
+            <a:ext cx="941545" cy="834526"/>
+          </a:xfrm>
+          <a:prstGeom prst="arc">
+            <a:avLst>
+              <a:gd name="adj1" fmla="val 16458577"/>
+              <a:gd name="adj2" fmla="val 5187811"/>
+            </a:avLst>
+          </a:prstGeom>
+          <a:ln>
+            <a:solidFill>
+              <a:schemeClr val="tx1"/>
+            </a:solidFill>
+            <a:prstDash val="dash"/>
+          </a:ln>
+        </p:spPr>
+        <p:style>
+          <a:lnRef idx="2">
+            <a:schemeClr val="accent1"/>
+          </a:lnRef>
+          <a:fillRef idx="0">
+            <a:schemeClr val="accent1"/>
+          </a:fillRef>
+          <a:effectRef idx="1">
+            <a:schemeClr val="accent1"/>
+          </a:effectRef>
+          <a:fontRef idx="minor">
+            <a:schemeClr val="tx1"/>
+          </a:fontRef>
+        </p:style>
+        <p:txBody>
+          <a:bodyPr rtlCol="0" anchor="ctr"/>
+          <a:lstStyle/>
+          <a:p>
+            <a:pPr algn="ctr"/>
+            <a:endParaRPr lang="en-DE"/>
+          </a:p>
+        </p:txBody>
+      </p:sp>
+      <p:cxnSp>
+        <p:nvCxnSpPr>
+          <p:cNvPr id="141" name="Gerade Verbindung mit Pfeil 140">
+            <a:extLst>
+              <a:ext uri="{FF2B5EF4-FFF2-40B4-BE49-F238E27FC236}">
+                <a16:creationId xmlns:a16="http://schemas.microsoft.com/office/drawing/2014/main" id="{BC24B70A-0FEF-A607-43D8-C37D17724A97}"/>
+              </a:ext>
+            </a:extLst>
+          </p:cNvPr>
+          <p:cNvCxnSpPr/>
+          <p:nvPr/>
+        </p:nvCxnSpPr>
+        <p:spPr>
+          <a:xfrm>
+            <a:off x="4473774" y="4643027"/>
+            <a:ext cx="371501" cy="0"/>
+          </a:xfrm>
+          <a:prstGeom prst="straightConnector1">
+            <a:avLst/>
+          </a:prstGeom>
+          <a:ln>
+            <a:solidFill>
+              <a:schemeClr val="tx1"/>
+            </a:solidFill>
+            <a:tailEnd type="triangle"/>
+          </a:ln>
+        </p:spPr>
+        <p:style>
+          <a:lnRef idx="2">
+            <a:schemeClr val="accent1"/>
+          </a:lnRef>
+          <a:fillRef idx="0">
+            <a:schemeClr val="accent1"/>
+          </a:fillRef>
+          <a:effectRef idx="1">
+            <a:schemeClr val="accent1"/>
+          </a:effectRef>
+          <a:fontRef idx="minor">
+            <a:schemeClr val="tx1"/>
+          </a:fontRef>
+        </p:style>
+      </p:cxnSp>
+      <p:cxnSp>
+        <p:nvCxnSpPr>
+          <p:cNvPr id="142" name="Gerade Verbindung mit Pfeil 141">
+            <a:extLst>
+              <a:ext uri="{FF2B5EF4-FFF2-40B4-BE49-F238E27FC236}">
+                <a16:creationId xmlns:a16="http://schemas.microsoft.com/office/drawing/2014/main" id="{BA6C1C46-13ED-8897-D15F-8281E1BE8BEA}"/>
+              </a:ext>
+            </a:extLst>
+          </p:cNvPr>
+          <p:cNvCxnSpPr/>
+          <p:nvPr/>
+        </p:nvCxnSpPr>
+        <p:spPr>
+          <a:xfrm>
+            <a:off x="4409766" y="4803176"/>
+            <a:ext cx="252000" cy="0"/>
+          </a:xfrm>
+          <a:prstGeom prst="straightConnector1">
+            <a:avLst/>
+          </a:prstGeom>
+          <a:ln>
+            <a:solidFill>
+              <a:schemeClr val="tx1"/>
+            </a:solidFill>
+            <a:tailEnd type="triangle"/>
+          </a:ln>
+        </p:spPr>
+        <p:style>
+          <a:lnRef idx="2">
+            <a:schemeClr val="accent1"/>
+          </a:lnRef>
+          <a:fillRef idx="0">
+            <a:schemeClr val="accent1"/>
+          </a:fillRef>
+          <a:effectRef idx="1">
+            <a:schemeClr val="accent1"/>
+          </a:effectRef>
+          <a:fontRef idx="minor">
+            <a:schemeClr val="tx1"/>
+          </a:fontRef>
+        </p:style>
+      </p:cxnSp>
+      <p:cxnSp>
+        <p:nvCxnSpPr>
+          <p:cNvPr id="143" name="Gerade Verbindung mit Pfeil 142">
+            <a:extLst>
+              <a:ext uri="{FF2B5EF4-FFF2-40B4-BE49-F238E27FC236}">
+                <a16:creationId xmlns:a16="http://schemas.microsoft.com/office/drawing/2014/main" id="{EBB460DE-32C7-E8C9-3C4D-7AADF85B0C88}"/>
+              </a:ext>
+            </a:extLst>
+          </p:cNvPr>
+          <p:cNvCxnSpPr/>
+          <p:nvPr/>
+        </p:nvCxnSpPr>
+        <p:spPr>
+          <a:xfrm>
+            <a:off x="4430771" y="4482878"/>
+            <a:ext cx="252000" cy="0"/>
+          </a:xfrm>
+          <a:prstGeom prst="straightConnector1">
+            <a:avLst/>
+          </a:prstGeom>
+          <a:ln>
+            <a:solidFill>
+              <a:schemeClr val="tx1"/>
+            </a:solidFill>
+            <a:tailEnd type="triangle"/>
+          </a:ln>
+        </p:spPr>
+        <p:style>
+          <a:lnRef idx="2">
+            <a:schemeClr val="accent1"/>
+          </a:lnRef>
+          <a:fillRef idx="0">
+            <a:schemeClr val="accent1"/>
+          </a:fillRef>
+          <a:effectRef idx="1">
+            <a:schemeClr val="accent1"/>
+          </a:effectRef>
+          <a:fontRef idx="minor">
+            <a:schemeClr val="tx1"/>
+          </a:fontRef>
+        </p:style>
+      </p:cxnSp>
+      <p:cxnSp>
+        <p:nvCxnSpPr>
+          <p:cNvPr id="144" name="Gerade Verbindung mit Pfeil 143">
+            <a:extLst>
+              <a:ext uri="{FF2B5EF4-FFF2-40B4-BE49-F238E27FC236}">
+                <a16:creationId xmlns:a16="http://schemas.microsoft.com/office/drawing/2014/main" id="{5BCEC22F-258F-02CD-7406-E17BB7FB5EEB}"/>
+              </a:ext>
+            </a:extLst>
+          </p:cNvPr>
+          <p:cNvCxnSpPr/>
+          <p:nvPr/>
+        </p:nvCxnSpPr>
+        <p:spPr>
+          <a:xfrm>
+            <a:off x="4304771" y="4322729"/>
+            <a:ext cx="180000" cy="0"/>
+          </a:xfrm>
+          <a:prstGeom prst="straightConnector1">
+            <a:avLst/>
+          </a:prstGeom>
+          <a:ln>
+            <a:solidFill>
+              <a:schemeClr val="tx1"/>
+            </a:solidFill>
+            <a:tailEnd type="triangle"/>
+          </a:ln>
+        </p:spPr>
+        <p:style>
+          <a:lnRef idx="2">
+            <a:schemeClr val="accent1"/>
+          </a:lnRef>
+          <a:fillRef idx="0">
+            <a:schemeClr val="accent1"/>
+          </a:fillRef>
+          <a:effectRef idx="1">
+            <a:schemeClr val="accent1"/>
+          </a:effectRef>
+          <a:fontRef idx="minor">
+            <a:schemeClr val="tx1"/>
+          </a:fontRef>
+        </p:style>
+      </p:cxnSp>
+      <p:cxnSp>
+        <p:nvCxnSpPr>
+          <p:cNvPr id="145" name="Gerade Verbindung mit Pfeil 144">
+            <a:extLst>
+              <a:ext uri="{FF2B5EF4-FFF2-40B4-BE49-F238E27FC236}">
+                <a16:creationId xmlns:a16="http://schemas.microsoft.com/office/drawing/2014/main" id="{1C12AAFB-31A1-F0EA-29D8-02253C45EA4E}"/>
+              </a:ext>
+            </a:extLst>
+          </p:cNvPr>
+          <p:cNvCxnSpPr/>
+          <p:nvPr/>
+        </p:nvCxnSpPr>
+        <p:spPr>
+          <a:xfrm>
+            <a:off x="4281021" y="4963326"/>
+            <a:ext cx="180000" cy="0"/>
+          </a:xfrm>
+          <a:prstGeom prst="straightConnector1">
+            <a:avLst/>
+          </a:prstGeom>
+          <a:ln>
+            <a:solidFill>
+              <a:schemeClr val="tx1"/>
+            </a:solidFill>
+            <a:tailEnd type="triangle"/>
+          </a:ln>
+        </p:spPr>
+        <p:style>
+          <a:lnRef idx="2">
+            <a:schemeClr val="accent1"/>
+          </a:lnRef>
+          <a:fillRef idx="0">
+            <a:schemeClr val="accent1"/>
+          </a:fillRef>
+          <a:effectRef idx="1">
+            <a:schemeClr val="accent1"/>
+          </a:effectRef>
+          <a:fontRef idx="minor">
+            <a:schemeClr val="tx1"/>
+          </a:fontRef>
+        </p:style>
+      </p:cxnSp>
+      <p:cxnSp>
+        <p:nvCxnSpPr>
+          <p:cNvPr id="147" name="Gerader Verbinder 146">
+            <a:extLst>
+              <a:ext uri="{FF2B5EF4-FFF2-40B4-BE49-F238E27FC236}">
+                <a16:creationId xmlns:a16="http://schemas.microsoft.com/office/drawing/2014/main" id="{5E1873D4-C051-1FB8-FF98-80536DCECA65}"/>
+              </a:ext>
+            </a:extLst>
+          </p:cNvPr>
+          <p:cNvCxnSpPr/>
+          <p:nvPr/>
+        </p:nvCxnSpPr>
+        <p:spPr>
+          <a:xfrm>
+            <a:off x="884503" y="4208826"/>
+            <a:ext cx="3994492" cy="0"/>
+          </a:xfrm>
+          <a:prstGeom prst="line">
+            <a:avLst/>
+          </a:prstGeom>
+          <a:ln>
+            <a:solidFill>
+              <a:schemeClr val="accent2">
+                <a:lumMod val="50000"/>
+              </a:schemeClr>
+            </a:solidFill>
+          </a:ln>
+        </p:spPr>
+        <p:style>
+          <a:lnRef idx="2">
+            <a:schemeClr val="accent1"/>
+          </a:lnRef>
+          <a:fillRef idx="0">
+            <a:schemeClr val="accent1"/>
+          </a:fillRef>
+          <a:effectRef idx="1">
+            <a:schemeClr val="accent1"/>
+          </a:effectRef>
+          <a:fontRef idx="minor">
+            <a:schemeClr val="tx1"/>
+          </a:fontRef>
+        </p:style>
+      </p:cxnSp>
+      <p:cxnSp>
+        <p:nvCxnSpPr>
+          <p:cNvPr id="148" name="Gerader Verbinder 147">
+            <a:extLst>
+              <a:ext uri="{FF2B5EF4-FFF2-40B4-BE49-F238E27FC236}">
+                <a16:creationId xmlns:a16="http://schemas.microsoft.com/office/drawing/2014/main" id="{62007CA3-E69E-4AB6-E7DE-0200D3F0BF1D}"/>
+              </a:ext>
+            </a:extLst>
+          </p:cNvPr>
+          <p:cNvCxnSpPr/>
+          <p:nvPr/>
+        </p:nvCxnSpPr>
+        <p:spPr>
+          <a:xfrm>
+            <a:off x="884503" y="5043352"/>
+            <a:ext cx="3994492" cy="0"/>
+          </a:xfrm>
+          <a:prstGeom prst="line">
+            <a:avLst/>
+          </a:prstGeom>
+          <a:ln>
+            <a:solidFill>
+              <a:schemeClr val="accent2">
+                <a:lumMod val="50000"/>
+              </a:schemeClr>
+            </a:solidFill>
+          </a:ln>
+        </p:spPr>
+        <p:style>
+          <a:lnRef idx="2">
+            <a:schemeClr val="accent1"/>
+          </a:lnRef>
+          <a:fillRef idx="0">
+            <a:schemeClr val="accent1"/>
+          </a:fillRef>
+          <a:effectRef idx="1">
+            <a:schemeClr val="accent1"/>
+          </a:effectRef>
+          <a:fontRef idx="minor">
+            <a:schemeClr val="tx1"/>
+          </a:fontRef>
+        </p:style>
+      </p:cxnSp>
     </p:spTree>
     <p:extLst>
       <p:ext uri="{BB962C8B-B14F-4D97-AF65-F5344CB8AC3E}">
@@ -11127,7 +12051,7 @@
                                 </p:cTn>
                               </p:par>
                               <p:par>
-                                <p:cTn id="8" presetID="10" presetClass="entr" presetSubtype="0" fill="hold" nodeType="withEffect">
+                                <p:cTn id="8" presetID="10" presetClass="entr" presetSubtype="0" fill="hold" grpId="0" nodeType="withEffect">
                                   <p:stCondLst>
                                     <p:cond delay="0"/>
                                   </p:stCondLst>
@@ -11135,41 +12059,6 @@
                                     <p:set>
                                       <p:cBhvr>
                                         <p:cTn id="9" dur="1" fill="hold">
-                                          <p:stCondLst>
-                                            <p:cond delay="0"/>
-                                          </p:stCondLst>
-                                        </p:cTn>
-                                        <p:tgtEl>
-                                          <p:spTgt spid="13"/>
-                                        </p:tgtEl>
-                                        <p:attrNameLst>
-                                          <p:attrName>style.visibility</p:attrName>
-                                        </p:attrNameLst>
-                                      </p:cBhvr>
-                                      <p:to>
-                                        <p:strVal val="visible"/>
-                                      </p:to>
-                                    </p:set>
-                                    <p:animEffect transition="in" filter="fade">
-                                      <p:cBhvr>
-                                        <p:cTn id="10" dur="500"/>
-                                        <p:tgtEl>
-                                          <p:spTgt spid="13"/>
-                                        </p:tgtEl>
-                                      </p:cBhvr>
-                                    </p:animEffect>
-                                  </p:childTnLst>
-                                </p:cTn>
-                              </p:par>
-                              <p:par>
-                                <p:cTn id="11" presetID="10" presetClass="entr" presetSubtype="0" fill="hold" grpId="0" nodeType="withEffect">
-                                  <p:stCondLst>
-                                    <p:cond delay="0"/>
-                                  </p:stCondLst>
-                                  <p:childTnLst>
-                                    <p:set>
-                                      <p:cBhvr>
-                                        <p:cTn id="12" dur="1" fill="hold">
                                           <p:stCondLst>
                                             <p:cond delay="0"/>
                                           </p:stCondLst>
@@ -11187,7 +12076,7 @@
                                     </p:set>
                                     <p:animEffect transition="in" filter="fade">
                                       <p:cBhvr>
-                                        <p:cTn id="13" dur="500"/>
+                                        <p:cTn id="10" dur="500"/>
                                         <p:tgtEl>
                                           <p:spTgt spid="39"/>
                                         </p:tgtEl>
@@ -11203,26 +12092,26 @@
                     </p:cTn>
                   </p:par>
                   <p:par>
-                    <p:cTn id="14" fill="hold">
+                    <p:cTn id="11" fill="hold">
                       <p:stCondLst>
                         <p:cond delay="indefinite"/>
                       </p:stCondLst>
                       <p:childTnLst>
                         <p:par>
-                          <p:cTn id="15" fill="hold">
+                          <p:cTn id="12" fill="hold">
                             <p:stCondLst>
                               <p:cond delay="0"/>
                             </p:stCondLst>
                             <p:childTnLst>
                               <p:par>
-                                <p:cTn id="16" presetID="10" presetClass="entr" presetSubtype="0" fill="hold" grpId="0" nodeType="clickEffect">
+                                <p:cTn id="13" presetID="10" presetClass="entr" presetSubtype="0" fill="hold" grpId="0" nodeType="clickEffect">
                                   <p:stCondLst>
                                     <p:cond delay="0"/>
                                   </p:stCondLst>
                                   <p:childTnLst>
                                     <p:set>
                                       <p:cBhvr>
-                                        <p:cTn id="17" dur="1" fill="hold">
+                                        <p:cTn id="14" dur="1" fill="hold">
                                           <p:stCondLst>
                                             <p:cond delay="0"/>
                                           </p:stCondLst>
@@ -11240,7 +12129,7 @@
                                     </p:set>
                                     <p:animEffect transition="in" filter="fade">
                                       <p:cBhvr>
-                                        <p:cTn id="18" dur="500"/>
+                                        <p:cTn id="15" dur="500"/>
                                         <p:tgtEl>
                                           <p:spTgt spid="33"/>
                                         </p:tgtEl>
@@ -11250,14 +12139,14 @@
                                 </p:cTn>
                               </p:par>
                               <p:par>
-                                <p:cTn id="19" presetID="10" presetClass="entr" presetSubtype="0" fill="hold" grpId="0" nodeType="withEffect">
+                                <p:cTn id="16" presetID="10" presetClass="entr" presetSubtype="0" fill="hold" grpId="0" nodeType="withEffect">
                                   <p:stCondLst>
                                     <p:cond delay="0"/>
                                   </p:stCondLst>
                                   <p:childTnLst>
                                     <p:set>
                                       <p:cBhvr>
-                                        <p:cTn id="20" dur="1" fill="hold">
+                                        <p:cTn id="17" dur="1" fill="hold">
                                           <p:stCondLst>
                                             <p:cond delay="0"/>
                                           </p:stCondLst>
@@ -11275,7 +12164,7 @@
                                     </p:set>
                                     <p:animEffect transition="in" filter="fade">
                                       <p:cBhvr>
-                                        <p:cTn id="21" dur="500"/>
+                                        <p:cTn id="18" dur="500"/>
                                         <p:tgtEl>
                                           <p:spTgt spid="34"/>
                                         </p:tgtEl>
@@ -11285,14 +12174,14 @@
                                 </p:cTn>
                               </p:par>
                               <p:par>
-                                <p:cTn id="22" presetID="10" presetClass="entr" presetSubtype="0" fill="hold" nodeType="withEffect">
+                                <p:cTn id="19" presetID="10" presetClass="entr" presetSubtype="0" fill="hold" nodeType="withEffect">
                                   <p:stCondLst>
                                     <p:cond delay="0"/>
                                   </p:stCondLst>
                                   <p:childTnLst>
                                     <p:set>
                                       <p:cBhvr>
-                                        <p:cTn id="23" dur="1" fill="hold">
+                                        <p:cTn id="20" dur="1" fill="hold">
                                           <p:stCondLst>
                                             <p:cond delay="0"/>
                                           </p:stCondLst>
@@ -11310,7 +12199,7 @@
                                     </p:set>
                                     <p:animEffect transition="in" filter="fade">
                                       <p:cBhvr>
-                                        <p:cTn id="24" dur="500"/>
+                                        <p:cTn id="21" dur="500"/>
                                         <p:tgtEl>
                                           <p:spTgt spid="32"/>
                                         </p:tgtEl>
@@ -11326,26 +12215,26 @@
                     </p:cTn>
                   </p:par>
                   <p:par>
-                    <p:cTn id="25" fill="hold">
+                    <p:cTn id="22" fill="hold">
                       <p:stCondLst>
                         <p:cond delay="indefinite"/>
                       </p:stCondLst>
                       <p:childTnLst>
                         <p:par>
-                          <p:cTn id="26" fill="hold">
+                          <p:cTn id="23" fill="hold">
                             <p:stCondLst>
                               <p:cond delay="0"/>
                             </p:stCondLst>
                             <p:childTnLst>
                               <p:par>
-                                <p:cTn id="27" presetID="10" presetClass="entr" presetSubtype="0" fill="hold" grpId="0" nodeType="clickEffect">
+                                <p:cTn id="24" presetID="10" presetClass="entr" presetSubtype="0" fill="hold" grpId="0" nodeType="clickEffect">
                                   <p:stCondLst>
                                     <p:cond delay="0"/>
                                   </p:stCondLst>
                                   <p:childTnLst>
                                     <p:set>
                                       <p:cBhvr>
-                                        <p:cTn id="28" dur="1" fill="hold">
+                                        <p:cTn id="25" dur="1" fill="hold">
                                           <p:stCondLst>
                                             <p:cond delay="0"/>
                                           </p:stCondLst>
@@ -11363,7 +12252,7 @@
                                     </p:set>
                                     <p:animEffect transition="in" filter="fade">
                                       <p:cBhvr>
-                                        <p:cTn id="29" dur="500"/>
+                                        <p:cTn id="26" dur="500"/>
                                         <p:tgtEl>
                                           <p:spTgt spid="38"/>
                                         </p:tgtEl>
@@ -11373,14 +12262,14 @@
                                 </p:cTn>
                               </p:par>
                               <p:par>
-                                <p:cTn id="30" presetID="10" presetClass="entr" presetSubtype="0" fill="hold" grpId="0" nodeType="withEffect">
+                                <p:cTn id="27" presetID="10" presetClass="entr" presetSubtype="0" fill="hold" grpId="0" nodeType="withEffect">
                                   <p:stCondLst>
                                     <p:cond delay="0"/>
                                   </p:stCondLst>
                                   <p:childTnLst>
                                     <p:set>
                                       <p:cBhvr>
-                                        <p:cTn id="31" dur="1" fill="hold">
+                                        <p:cTn id="28" dur="1" fill="hold">
                                           <p:stCondLst>
                                             <p:cond delay="0"/>
                                           </p:stCondLst>
@@ -11398,7 +12287,7 @@
                                     </p:set>
                                     <p:animEffect transition="in" filter="fade">
                                       <p:cBhvr>
-                                        <p:cTn id="32" dur="500"/>
+                                        <p:cTn id="29" dur="500"/>
                                         <p:tgtEl>
                                           <p:spTgt spid="40"/>
                                         </p:tgtEl>
